--- a/lecture-decks/Control_Systems/CS_U2b_Second_Order_Time_Response.pptx
+++ b/lecture-decks/Control_Systems/CS_U2b_Second_Order_Time_Response.pptx
@@ -4854,8 +4854,8 @@
         </p:blipFill>
         <p:spPr>
           <a:xfrm>
-            <a:off x="5257800" y="1143000"/>
-            <a:ext cx="3429000" cy="2834640"/>
+            <a:off x="5257800" y="1231583"/>
+            <a:ext cx="3429000" cy="2657475"/>
           </a:xfrm>
           <a:prstGeom prst="rect">
             <a:avLst/>
@@ -5222,8 +5222,8 @@
         </p:blipFill>
         <p:spPr>
           <a:xfrm>
-            <a:off x="5257800" y="1143000"/>
-            <a:ext cx="3429000" cy="2834640"/>
+            <a:off x="5257800" y="1231583"/>
+            <a:ext cx="3429000" cy="2657475"/>
           </a:xfrm>
           <a:prstGeom prst="rect">
             <a:avLst/>
